--- a/classes/parte-2-criptografia-aplicada/057-almacenamiento-seguro-de-contrasenas-bcrypt-scrypt-y-argon2/clase-057-presentacion.pptx
+++ b/classes/parte-2-criptografia-aplicada/057-almacenamiento-seguro-de-contrasenas-bcrypt-scrypt-y-argon2/clase-057-presentacion.pptx
@@ -17,6 +17,9 @@
     <p:sldId id="265" r:id="rId16"/>
     <p:sldId id="266" r:id="rId17"/>
     <p:sldId id="267" r:id="rId18"/>
+    <p:sldId id="268" r:id="rId19"/>
+    <p:sldId id="269" r:id="rId20"/>
+    <p:sldId id="270" r:id="rId21"/>
   </p:sldIdLst>
   <p:sldSz cx="9144000" cy="6858000" type="screen4x3"/>
   <p:notesSz cx="6858000" cy="9144000"/>
@@ -3198,7 +3201,7 @@
                   <a:srgbClr val="0B3D2E"/>
                 </a:solidFill>
               </a:rPr>
-              <a:t>⚠️ Errores comunes</a:t>
+              <a:t>✍️ Ejercicios</a:t>
             </a:r>
           </a:p>
         </p:txBody>
@@ -3236,67 +3239,82 @@
                   <a:srgbClr val="22282E"/>
                 </a:solidFill>
               </a:rPr>
-              <a:t>•  Contraseñas con SHA-256/MD5 — Demasiado rápidas; migra a Argon2id/bcrypt/scrypt</a:t>
-            </a:r>
-          </a:p>
-          <a:p>
-            <a:pPr>
-              <a:spcAft>
-                <a:spcPts val="600"/>
-              </a:spcAft>
-            </a:pPr>
-            <a:r>
-              <a:rPr sz="1500">
-                <a:solidFill>
-                  <a:srgbClr val="22282E"/>
-                </a:solidFill>
-              </a:rPr>
-              <a:t>•  Salt reutilizado o global — Debilita; usa salt aleatorio por usuario</a:t>
-            </a:r>
-          </a:p>
-          <a:p>
-            <a:pPr>
-              <a:spcAft>
-                <a:spcPts val="600"/>
-              </a:spcAft>
-            </a:pPr>
-            <a:r>
-              <a:rPr sz="1500">
-                <a:solidFill>
-                  <a:srgbClr val="22282E"/>
-                </a:solidFill>
-              </a:rPr>
-              <a:t>•  Factor de coste demasiado bajo — Fácil de crackear; calíbralo a cientos de ms</a:t>
-            </a:r>
-          </a:p>
-          <a:p>
-            <a:pPr>
-              <a:spcAft>
-                <a:spcPts val="600"/>
-              </a:spcAft>
-            </a:pPr>
-            <a:r>
-              <a:rPr sz="1500">
-                <a:solidFill>
-                  <a:srgbClr val="22282E"/>
-                </a:solidFill>
-              </a:rPr>
-              <a:t>•  Comparar hashes con == — Timing; usa la verificación de la librería</a:t>
-            </a:r>
-          </a:p>
-          <a:p>
-            <a:pPr>
-              <a:spcAft>
-                <a:spcPts val="600"/>
-              </a:spcAft>
-            </a:pPr>
-            <a:r>
-              <a:rPr sz="1500">
-                <a:solidFill>
-                  <a:srgbClr val="22282E"/>
-                </a:solidFill>
-              </a:rPr>
-              <a:t>•  bcrypt con contraseña &gt;72 bytes — Se trunca; considera pre-hash o Argon2</a:t>
+              <a:t>•  Explica por qué un salt único por usuario derrota las rainbow tables.</a:t>
+            </a:r>
+          </a:p>
+          <a:p>
+            <a:pPr>
+              <a:spcAft>
+                <a:spcPts val="600"/>
+              </a:spcAft>
+            </a:pPr>
+            <a:r>
+              <a:rPr sz="1500">
+                <a:solidFill>
+                  <a:srgbClr val="22282E"/>
+                </a:solidFill>
+              </a:rPr>
+              <a:t>•  ¿Dónde debe guardarse el pepper y por qué no en la misma base de datos?</a:t>
+            </a:r>
+          </a:p>
+          <a:p>
+            <a:pPr>
+              <a:spcAft>
+                <a:spcPts val="600"/>
+              </a:spcAft>
+            </a:pPr>
+            <a:r>
+              <a:rPr sz="1500">
+                <a:solidFill>
+                  <a:srgbClr val="22282E"/>
+                </a:solidFill>
+              </a:rPr>
+              <a:t>•  Compara el tiempo de cracking de SHA-256 vs Argon2id para la misma wordlist.</a:t>
+            </a:r>
+          </a:p>
+          <a:p>
+            <a:pPr>
+              <a:spcAft>
+                <a:spcPts val="600"/>
+              </a:spcAft>
+            </a:pPr>
+            <a:r>
+              <a:rPr sz="1500">
+                <a:solidFill>
+                  <a:srgbClr val="22282E"/>
+                </a:solidFill>
+              </a:rPr>
+              <a:t>•  Calibra Argon2id para ~300 ms por hash en tu máquina.</a:t>
+            </a:r>
+          </a:p>
+          <a:p>
+            <a:pPr>
+              <a:spcAft>
+                <a:spcPts val="600"/>
+              </a:spcAft>
+            </a:pPr>
+            <a:r>
+              <a:rPr sz="1500">
+                <a:solidFill>
+                  <a:srgbClr val="22282E"/>
+                </a:solidFill>
+              </a:rPr>
+              <a:t>•  Investiga por qué bcrypt trunca a 72 bytes y cómo afecta a contraseñas largas.</a:t>
+            </a:r>
+          </a:p>
+          <a:p>
+            <a:pPr>
+              <a:spcAft>
+                <a:spcPts val="600"/>
+              </a:spcAft>
+            </a:pPr>
+            <a:r>
+              <a:rPr sz="1500">
+                <a:solidFill>
+                  <a:srgbClr val="22282E"/>
+                </a:solidFill>
+              </a:rPr>
+              <a:t>•  Diseña una política de migración de hashes SHA-256 heredados a Argon2id.</a:t>
             </a:r>
           </a:p>
         </p:txBody>
@@ -3347,7 +3365,7 @@
                   <a:srgbClr val="0B3D2E"/>
                 </a:solidFill>
               </a:rPr>
-              <a:t>❓ Preguntas frecuentes</a:t>
+              <a:t>📝 Reto verificable</a:t>
             </a:r>
           </a:p>
         </p:txBody>
@@ -3385,82 +3403,7 @@
                   <a:srgbClr val="22282E"/>
                 </a:solidFill>
               </a:rPr>
-              <a:t>•  ❓ ¿Cuál elijo: bcrypt, scrypt o Argon2?</a:t>
-            </a:r>
-          </a:p>
-          <a:p>
-            <a:pPr>
-              <a:spcAft>
-                <a:spcPts val="600"/>
-              </a:spcAft>
-            </a:pPr>
-            <a:r>
-              <a:rPr sz="1500">
-                <a:solidFill>
-                  <a:srgbClr val="22282E"/>
-                </a:solidFill>
-              </a:rPr>
-              <a:t>•  Argon2id por defecto en diseños nuevos. bcrypt sigue siendo aceptable; scrypt es válido donde ya se usa.</a:t>
-            </a:r>
-          </a:p>
-          <a:p>
-            <a:pPr>
-              <a:spcAft>
-                <a:spcPts val="600"/>
-              </a:spcAft>
-            </a:pPr>
-            <a:r>
-              <a:rPr sz="1500">
-                <a:solidFill>
-                  <a:srgbClr val="22282E"/>
-                </a:solidFill>
-              </a:rPr>
-              <a:t>•  ❓ ¿El salt debe ser secreto?</a:t>
-            </a:r>
-          </a:p>
-          <a:p>
-            <a:pPr>
-              <a:spcAft>
-                <a:spcPts val="600"/>
-              </a:spcAft>
-            </a:pPr>
-            <a:r>
-              <a:rPr sz="1500">
-                <a:solidFill>
-                  <a:srgbClr val="22282E"/>
-                </a:solidFill>
-              </a:rPr>
-              <a:t>•  No; el salt puede ser público (se guarda con el hash). Lo secreto es el pepper.</a:t>
-            </a:r>
-          </a:p>
-          <a:p>
-            <a:pPr>
-              <a:spcAft>
-                <a:spcPts val="600"/>
-              </a:spcAft>
-            </a:pPr>
-            <a:r>
-              <a:rPr sz="1500">
-                <a:solidFill>
-                  <a:srgbClr val="22282E"/>
-                </a:solidFill>
-              </a:rPr>
-              <a:t>•  ❓ ¿Puedo "cifrar" contraseñas en vez de hashearlas?</a:t>
-            </a:r>
-          </a:p>
-          <a:p>
-            <a:pPr>
-              <a:spcAft>
-                <a:spcPts val="600"/>
-              </a:spcAft>
-            </a:pPr>
-            <a:r>
-              <a:rPr sz="1500">
-                <a:solidFill>
-                  <a:srgbClr val="22282E"/>
-                </a:solidFill>
-              </a:rPr>
-              <a:t>•  No; hashea con una KDF. Cifrar implica poder descifrar, un riesgo innecesario para autenticación.</a:t>
+              <a:t>•  Implementa un módulo de registro/login que almacene contraseñas con Argon2id (salt automático, parámetros calibrados) y verifique en tiempo constante, más un migrador que rehashee credenciales…</a:t>
             </a:r>
           </a:p>
         </p:txBody>
@@ -3511,7 +3454,7 @@
                   <a:srgbClr val="0B3D2E"/>
                 </a:solidFill>
               </a:rPr>
-              <a:t>🔗 Referencias</a:t>
+              <a:t>⚠️ Errores comunes</a:t>
             </a:r>
           </a:p>
         </p:txBody>
@@ -3549,6 +3492,319 @@
                   <a:srgbClr val="22282E"/>
                 </a:solidFill>
               </a:rPr>
+              <a:t>•  Contraseñas con SHA-256/MD5 — Demasiado rápidas; migra a Argon2id/bcrypt/scrypt</a:t>
+            </a:r>
+          </a:p>
+          <a:p>
+            <a:pPr>
+              <a:spcAft>
+                <a:spcPts val="600"/>
+              </a:spcAft>
+            </a:pPr>
+            <a:r>
+              <a:rPr sz="1500">
+                <a:solidFill>
+                  <a:srgbClr val="22282E"/>
+                </a:solidFill>
+              </a:rPr>
+              <a:t>•  Salt reutilizado o global — Debilita; usa salt aleatorio por usuario</a:t>
+            </a:r>
+          </a:p>
+          <a:p>
+            <a:pPr>
+              <a:spcAft>
+                <a:spcPts val="600"/>
+              </a:spcAft>
+            </a:pPr>
+            <a:r>
+              <a:rPr sz="1500">
+                <a:solidFill>
+                  <a:srgbClr val="22282E"/>
+                </a:solidFill>
+              </a:rPr>
+              <a:t>•  Factor de coste demasiado bajo — Fácil de crackear; calíbralo a cientos de ms</a:t>
+            </a:r>
+          </a:p>
+          <a:p>
+            <a:pPr>
+              <a:spcAft>
+                <a:spcPts val="600"/>
+              </a:spcAft>
+            </a:pPr>
+            <a:r>
+              <a:rPr sz="1500">
+                <a:solidFill>
+                  <a:srgbClr val="22282E"/>
+                </a:solidFill>
+              </a:rPr>
+              <a:t>•  Comparar hashes con == — Timing; usa la verificación de la librería</a:t>
+            </a:r>
+          </a:p>
+          <a:p>
+            <a:pPr>
+              <a:spcAft>
+                <a:spcPts val="600"/>
+              </a:spcAft>
+            </a:pPr>
+            <a:r>
+              <a:rPr sz="1500">
+                <a:solidFill>
+                  <a:srgbClr val="22282E"/>
+                </a:solidFill>
+              </a:rPr>
+              <a:t>•  bcrypt con contraseña &gt;72 bytes — Se trunca; considera pre-hash o Argon2</a:t>
+            </a:r>
+          </a:p>
+        </p:txBody>
+      </p:sp>
+    </p:spTree>
+  </p:cSld>
+  <p:clrMapOvr>
+    <a:masterClrMapping/>
+  </p:clrMapOvr>
+</p:sld>
+</file>
+
+<file path=ppt/slides/slide13.xml><?xml version="1.0" encoding="utf-8"?>
+<p:sld xmlns:a="http://schemas.openxmlformats.org/drawingml/2006/main" xmlns:p="http://schemas.openxmlformats.org/presentationml/2006/main" xmlns:r="http://schemas.openxmlformats.org/officeDocument/2006/relationships">
+  <p:cSld>
+    <p:spTree>
+      <p:nvGrpSpPr>
+        <p:cNvPr id="1" name=""/>
+        <p:cNvGrpSpPr/>
+        <p:nvPr/>
+      </p:nvGrpSpPr>
+      <p:grpSpPr/>
+      <p:sp>
+        <p:nvSpPr>
+          <p:cNvPr id="2" name="TextBox 1"/>
+          <p:cNvSpPr txBox="1"/>
+          <p:nvPr/>
+        </p:nvSpPr>
+        <p:spPr>
+          <a:xfrm>
+            <a:off x="457200" y="320040"/>
+            <a:ext cx="8229600" cy="822960"/>
+          </a:xfrm>
+          <a:prstGeom prst="rect">
+            <a:avLst/>
+          </a:prstGeom>
+          <a:noFill/>
+        </p:spPr>
+        <p:txBody>
+          <a:bodyPr wrap="square">
+            <a:spAutoFit/>
+          </a:bodyPr>
+          <a:lstStyle/>
+          <a:p>
+            <a:r>
+              <a:rPr sz="2600" b="1">
+                <a:solidFill>
+                  <a:srgbClr val="0B3D2E"/>
+                </a:solidFill>
+              </a:rPr>
+              <a:t>❓ Preguntas frecuentes</a:t>
+            </a:r>
+          </a:p>
+        </p:txBody>
+      </p:sp>
+      <p:sp>
+        <p:nvSpPr>
+          <p:cNvPr id="3" name="TextBox 2"/>
+          <p:cNvSpPr txBox="1"/>
+          <p:nvPr/>
+        </p:nvSpPr>
+        <p:spPr>
+          <a:xfrm>
+            <a:off x="457200" y="1280160"/>
+            <a:ext cx="8229600" cy="4937760"/>
+          </a:xfrm>
+          <a:prstGeom prst="rect">
+            <a:avLst/>
+          </a:prstGeom>
+          <a:noFill/>
+        </p:spPr>
+        <p:txBody>
+          <a:bodyPr wrap="square">
+            <a:spAutoFit/>
+          </a:bodyPr>
+          <a:lstStyle/>
+          <a:p>
+            <a:pPr>
+              <a:spcAft>
+                <a:spcPts val="600"/>
+              </a:spcAft>
+            </a:pPr>
+            <a:r>
+              <a:rPr sz="1500">
+                <a:solidFill>
+                  <a:srgbClr val="22282E"/>
+                </a:solidFill>
+              </a:rPr>
+              <a:t>•  ❓ ¿Cuál elijo: bcrypt, scrypt o Argon2?</a:t>
+            </a:r>
+          </a:p>
+          <a:p>
+            <a:pPr>
+              <a:spcAft>
+                <a:spcPts val="600"/>
+              </a:spcAft>
+            </a:pPr>
+            <a:r>
+              <a:rPr sz="1500">
+                <a:solidFill>
+                  <a:srgbClr val="22282E"/>
+                </a:solidFill>
+              </a:rPr>
+              <a:t>•  Argon2id por defecto en diseños nuevos. bcrypt sigue siendo aceptable; scrypt es válido donde ya se usa.</a:t>
+            </a:r>
+          </a:p>
+          <a:p>
+            <a:pPr>
+              <a:spcAft>
+                <a:spcPts val="600"/>
+              </a:spcAft>
+            </a:pPr>
+            <a:r>
+              <a:rPr sz="1500">
+                <a:solidFill>
+                  <a:srgbClr val="22282E"/>
+                </a:solidFill>
+              </a:rPr>
+              <a:t>•  ❓ ¿El salt debe ser secreto?</a:t>
+            </a:r>
+          </a:p>
+          <a:p>
+            <a:pPr>
+              <a:spcAft>
+                <a:spcPts val="600"/>
+              </a:spcAft>
+            </a:pPr>
+            <a:r>
+              <a:rPr sz="1500">
+                <a:solidFill>
+                  <a:srgbClr val="22282E"/>
+                </a:solidFill>
+              </a:rPr>
+              <a:t>•  No; el salt puede ser público (se guarda con el hash). Lo secreto es el pepper.</a:t>
+            </a:r>
+          </a:p>
+          <a:p>
+            <a:pPr>
+              <a:spcAft>
+                <a:spcPts val="600"/>
+              </a:spcAft>
+            </a:pPr>
+            <a:r>
+              <a:rPr sz="1500">
+                <a:solidFill>
+                  <a:srgbClr val="22282E"/>
+                </a:solidFill>
+              </a:rPr>
+              <a:t>•  ❓ ¿Puedo "cifrar" contraseñas en vez de hashearlas?</a:t>
+            </a:r>
+          </a:p>
+          <a:p>
+            <a:pPr>
+              <a:spcAft>
+                <a:spcPts val="600"/>
+              </a:spcAft>
+            </a:pPr>
+            <a:r>
+              <a:rPr sz="1500">
+                <a:solidFill>
+                  <a:srgbClr val="22282E"/>
+                </a:solidFill>
+              </a:rPr>
+              <a:t>•  No; hashea con una KDF. Cifrar implica poder descifrar, un riesgo innecesario para autenticación.</a:t>
+            </a:r>
+          </a:p>
+        </p:txBody>
+      </p:sp>
+    </p:spTree>
+  </p:cSld>
+  <p:clrMapOvr>
+    <a:masterClrMapping/>
+  </p:clrMapOvr>
+</p:sld>
+</file>
+
+<file path=ppt/slides/slide14.xml><?xml version="1.0" encoding="utf-8"?>
+<p:sld xmlns:a="http://schemas.openxmlformats.org/drawingml/2006/main" xmlns:p="http://schemas.openxmlformats.org/presentationml/2006/main" xmlns:r="http://schemas.openxmlformats.org/officeDocument/2006/relationships">
+  <p:cSld>
+    <p:spTree>
+      <p:nvGrpSpPr>
+        <p:cNvPr id="1" name=""/>
+        <p:cNvGrpSpPr/>
+        <p:nvPr/>
+      </p:nvGrpSpPr>
+      <p:grpSpPr/>
+      <p:sp>
+        <p:nvSpPr>
+          <p:cNvPr id="2" name="TextBox 1"/>
+          <p:cNvSpPr txBox="1"/>
+          <p:nvPr/>
+        </p:nvSpPr>
+        <p:spPr>
+          <a:xfrm>
+            <a:off x="457200" y="320040"/>
+            <a:ext cx="8229600" cy="822960"/>
+          </a:xfrm>
+          <a:prstGeom prst="rect">
+            <a:avLst/>
+          </a:prstGeom>
+          <a:noFill/>
+        </p:spPr>
+        <p:txBody>
+          <a:bodyPr wrap="square">
+            <a:spAutoFit/>
+          </a:bodyPr>
+          <a:lstStyle/>
+          <a:p>
+            <a:r>
+              <a:rPr sz="2600" b="1">
+                <a:solidFill>
+                  <a:srgbClr val="0B3D2E"/>
+                </a:solidFill>
+              </a:rPr>
+              <a:t>🔗 Referencias</a:t>
+            </a:r>
+          </a:p>
+        </p:txBody>
+      </p:sp>
+      <p:sp>
+        <p:nvSpPr>
+          <p:cNvPr id="3" name="TextBox 2"/>
+          <p:cNvSpPr txBox="1"/>
+          <p:nvPr/>
+        </p:nvSpPr>
+        <p:spPr>
+          <a:xfrm>
+            <a:off x="457200" y="1280160"/>
+            <a:ext cx="8229600" cy="4937760"/>
+          </a:xfrm>
+          <a:prstGeom prst="rect">
+            <a:avLst/>
+          </a:prstGeom>
+          <a:noFill/>
+        </p:spPr>
+        <p:txBody>
+          <a:bodyPr wrap="square">
+            <a:spAutoFit/>
+          </a:bodyPr>
+          <a:lstStyle/>
+          <a:p>
+            <a:pPr>
+              <a:spcAft>
+                <a:spcPts val="600"/>
+              </a:spcAft>
+            </a:pPr>
+            <a:r>
+              <a:rPr sz="1500">
+                <a:solidFill>
+                  <a:srgbClr val="22282E"/>
+                </a:solidFill>
+              </a:rPr>
               <a:t>•  OWASP Password Storage Cheat Sheet — &lt;https://cheatsheetseries.owasp.org/cheatsheets/PasswordStorageCheatSheet.html&gt;</a:t>
             </a:r>
           </a:p>
@@ -3599,6 +3855,81 @@
           </a:p>
         </p:txBody>
       </p:sp>
+    </p:spTree>
+  </p:cSld>
+  <p:clrMapOvr>
+    <a:masterClrMapping/>
+  </p:clrMapOvr>
+</p:sld>
+</file>
+
+<file path=ppt/slides/slide15.xml><?xml version="1.0" encoding="utf-8"?>
+<p:sld xmlns:a="http://schemas.openxmlformats.org/drawingml/2006/main" xmlns:p="http://schemas.openxmlformats.org/presentationml/2006/main" xmlns:r="http://schemas.openxmlformats.org/officeDocument/2006/relationships">
+  <p:cSld>
+    <p:spTree>
+      <p:nvGrpSpPr>
+        <p:cNvPr id="1" name=""/>
+        <p:cNvGrpSpPr/>
+        <p:nvPr/>
+      </p:nvGrpSpPr>
+      <p:grpSpPr/>
+      <p:sp>
+        <p:nvSpPr>
+          <p:cNvPr id="2" name="TextBox 1"/>
+          <p:cNvSpPr txBox="1"/>
+          <p:nvPr/>
+        </p:nvSpPr>
+        <p:spPr>
+          <a:xfrm>
+            <a:off x="457200" y="274320"/>
+            <a:ext cx="8229600" cy="640080"/>
+          </a:xfrm>
+          <a:prstGeom prst="rect">
+            <a:avLst/>
+          </a:prstGeom>
+          <a:noFill/>
+        </p:spPr>
+        <p:txBody>
+          <a:bodyPr wrap="square">
+            <a:spAutoFit/>
+          </a:bodyPr>
+          <a:lstStyle/>
+          <a:p>
+            <a:r>
+              <a:rPr sz="2200" b="1">
+                <a:solidFill>
+                  <a:srgbClr val="0B3D2E"/>
+                </a:solidFill>
+              </a:rPr>
+              <a:t>Diagrama de la clase</a:t>
+            </a:r>
+          </a:p>
+        </p:txBody>
+      </p:sp>
+      <p:pic>
+        <p:nvPicPr>
+          <p:cNvPr id="3" name="Picture 2" descr="637db43bace00c3c.png"/>
+          <p:cNvPicPr>
+            <a:picLocks noChangeAspect="1"/>
+          </p:cNvPicPr>
+          <p:nvPr/>
+        </p:nvPicPr>
+        <p:blipFill>
+          <a:blip r:embed="rId2"/>
+          <a:stretch>
+            <a:fillRect/>
+          </a:stretch>
+        </p:blipFill>
+        <p:spPr>
+          <a:xfrm>
+            <a:off x="457200" y="1613916"/>
+            <a:ext cx="8229600" cy="4270248"/>
+          </a:xfrm>
+          <a:prstGeom prst="rect">
+            <a:avLst/>
+          </a:prstGeom>
+        </p:spPr>
+      </p:pic>
     </p:spTree>
   </p:cSld>
   <p:clrMapOvr>
@@ -3683,7 +4014,7 @@
                   <a:srgbClr val="22282E"/>
                 </a:solidFill>
               </a:rPr>
-              <a:t>•  Aprender a almacenar contraseñas de forma resistente a cracking usando funciones de derivación de clave lentas y con memoria intensiva (bcrypt, scrypt, Argon2), y por qué usar SHA-256 o MD5 para contraseñas es un error grave. El alumno entenderá el papel del salt, el pepper, el factor de coste y estimará el coste real de un ataque con hashcat en un entorno de laboratorio.</a:t>
+              <a:t>•  Aprender a almacenar contraseñas de forma resistente a cracking usando funciones de derivación de clave lentas y con memoria intensiva (bcrypt, scrypt, Argon2), y por qué usar SHA-256 o MD5 para…</a:t>
             </a:r>
           </a:p>
         </p:txBody>
@@ -4077,7 +4408,7 @@
                   <a:srgbClr val="0B3D2E"/>
                 </a:solidFill>
               </a:rPr>
-              <a:t>📖 Definiciones y características</a:t>
+              <a:t>🧠 Explicación en profundidad</a:t>
             </a:r>
           </a:p>
         </p:txBody>
@@ -4115,97 +4446,97 @@
                   <a:srgbClr val="22282E"/>
                 </a:solidFill>
               </a:rPr>
-              <a:t>•  Función de derivación de clave (KDF) para contraseñas: función lenta y ajustable que transforma la contraseña en un hash. Característica: coste configurable para frenar ataques.</a:t>
-            </a:r>
-          </a:p>
-          <a:p>
-            <a:pPr>
-              <a:spcAft>
-                <a:spcPts val="600"/>
-              </a:spcAft>
-            </a:pPr>
-            <a:r>
-              <a:rPr sz="1500">
-                <a:solidFill>
-                  <a:srgbClr val="22282E"/>
-                </a:solidFill>
-              </a:rPr>
-              <a:t>•  Salt: valor aleatorio único por usuario almacenado junto al hash; impide rainbow tables y colisiones entre usuarios con igual contraseña.</a:t>
-            </a:r>
-          </a:p>
-          <a:p>
-            <a:pPr>
-              <a:spcAft>
-                <a:spcPts val="600"/>
-              </a:spcAft>
-            </a:pPr>
-            <a:r>
-              <a:rPr sz="1500">
-                <a:solidFill>
-                  <a:srgbClr val="22282E"/>
-                </a:solidFill>
-              </a:rPr>
-              <a:t>•  Pepper: secreto global no almacenado en la base de datos (en HSM/KMS); añade una capa que el atacante no obtiene con solo el dump.</a:t>
-            </a:r>
-          </a:p>
-          <a:p>
-            <a:pPr>
-              <a:spcAft>
-                <a:spcPts val="600"/>
-              </a:spcAft>
-            </a:pPr>
-            <a:r>
-              <a:rPr sz="1500">
-                <a:solidFill>
-                  <a:srgbClr val="22282E"/>
-                </a:solidFill>
-              </a:rPr>
-              <a:t>•  bcrypt: KDF basada en Blowfish con factor de coste (rondas). Limitada a 72 bytes de entrada.</a:t>
-            </a:r>
-          </a:p>
-          <a:p>
-            <a:pPr>
-              <a:spcAft>
-                <a:spcPts val="600"/>
-              </a:spcAft>
-            </a:pPr>
-            <a:r>
-              <a:rPr sz="1500">
-                <a:solidFill>
-                  <a:srgbClr val="22282E"/>
-                </a:solidFill>
-              </a:rPr>
-              <a:t>•  scrypt: KDF con coste de memoria, dificultando ataques con hardware especializado.</a:t>
-            </a:r>
-          </a:p>
-          <a:p>
-            <a:pPr>
-              <a:spcAft>
-                <a:spcPts val="600"/>
-              </a:spcAft>
-            </a:pPr>
-            <a:r>
-              <a:rPr sz="1500">
-                <a:solidFill>
-                  <a:srgbClr val="22282E"/>
-                </a:solidFill>
-              </a:rPr>
-              <a:t>•  Argon2id: ganador del Password Hashing Competition; recomendado por defecto; combina resistencia a GPU y a side-channels.</a:t>
-            </a:r>
-          </a:p>
-          <a:p>
-            <a:pPr>
-              <a:spcAft>
-                <a:spcPts val="600"/>
-              </a:spcAft>
-            </a:pPr>
-            <a:r>
-              <a:rPr sz="1500">
-                <a:solidFill>
-                  <a:srgbClr val="22282E"/>
-                </a:solidFill>
-              </a:rPr>
-              <a:t>•  hashcat: herramienta de recuperación de contraseñas (para auditar la fortaleza de tus propios hashes).</a:t>
+              <a:t>•  SHA-256 está diseñado para ser rapidísimo, y eso es exactamente lo que lo hace inservible</a:t>
+            </a:r>
+          </a:p>
+          <a:p>
+            <a:pPr>
+              <a:spcAft>
+                <a:spcPts val="600"/>
+              </a:spcAft>
+            </a:pPr>
+            <a:r>
+              <a:rPr sz="1500">
+                <a:solidFill>
+                  <a:srgbClr val="22282E"/>
+                </a:solidFill>
+              </a:rPr>
+              <a:t>•  para almacenar contraseñas. Una GPU doméstica calcula del orden de miles de millones</a:t>
+            </a:r>
+          </a:p>
+          <a:p>
+            <a:pPr>
+              <a:spcAft>
+                <a:spcPts val="600"/>
+              </a:spcAft>
+            </a:pPr>
+            <a:r>
+              <a:rPr sz="1500">
+                <a:solidFill>
+                  <a:srgbClr val="22282E"/>
+                </a:solidFill>
+              </a:rPr>
+              <a:t>•  de SHA-256 por segundo; contra una base de datos filtrada, eso significa probar todo un</a:t>
+            </a:r>
+          </a:p>
+          <a:p>
+            <a:pPr>
+              <a:spcAft>
+                <a:spcPts val="600"/>
+              </a:spcAft>
+            </a:pPr>
+            <a:r>
+              <a:rPr sz="1500">
+                <a:solidFill>
+                  <a:srgbClr val="22282E"/>
+                </a:solidFill>
+              </a:rPr>
+              <a:t>•  diccionario y sus mutaciones en minutos. La contramedida no es un hash "más fuerte", sino</a:t>
+            </a:r>
+          </a:p>
+          <a:p>
+            <a:pPr>
+              <a:spcAft>
+                <a:spcPts val="600"/>
+              </a:spcAft>
+            </a:pPr>
+            <a:r>
+              <a:rPr sz="1500">
+                <a:solidFill>
+                  <a:srgbClr val="22282E"/>
+                </a:solidFill>
+              </a:rPr>
+              <a:t>•  una función deliberadamente lenta y costosa: si verificar una contraseña legítima</a:t>
+            </a:r>
+          </a:p>
+          <a:p>
+            <a:pPr>
+              <a:spcAft>
+                <a:spcPts val="600"/>
+              </a:spcAft>
+            </a:pPr>
+            <a:r>
+              <a:rPr sz="1500">
+                <a:solidFill>
+                  <a:srgbClr val="22282E"/>
+                </a:solidFill>
+              </a:rPr>
+              <a:t>•  tarda 250 ms, al usuario no le molesta, pero al atacante le convierte mil millones de</a:t>
+            </a:r>
+          </a:p>
+          <a:p>
+            <a:pPr>
+              <a:spcAft>
+                <a:spcPts val="600"/>
+              </a:spcAft>
+            </a:pPr>
+            <a:r>
+              <a:rPr sz="1500">
+                <a:solidFill>
+                  <a:srgbClr val="22282E"/>
+                </a:solidFill>
+              </a:rPr>
+              <a:t>•  intentos por segundo en cuatro.</a:t>
             </a:r>
           </a:p>
         </p:txBody>
@@ -4256,7 +4587,7 @@
                   <a:srgbClr val="0B3D2E"/>
                 </a:solidFill>
               </a:rPr>
-              <a:t>🧰 Herramientas y preparación</a:t>
+              <a:t>📖 Definiciones y características</a:t>
             </a:r>
           </a:p>
         </p:txBody>
@@ -4294,37 +4625,97 @@
                   <a:srgbClr val="22282E"/>
                 </a:solidFill>
               </a:rPr>
-              <a:t>•  pip install argon2-cffi bcrypt</a:t>
-            </a:r>
-          </a:p>
-          <a:p>
-            <a:pPr>
-              <a:spcAft>
-                <a:spcPts val="600"/>
-              </a:spcAft>
-            </a:pPr>
-            <a:r>
-              <a:rPr sz="1500">
-                <a:solidFill>
-                  <a:srgbClr val="22282E"/>
-                </a:solidFill>
-              </a:rPr>
-              <a:t>•  hashcat --version 2&gt;/dev/null || echo "instala hashcat para el lab de auditoría"</a:t>
-            </a:r>
-          </a:p>
-          <a:p>
-            <a:pPr>
-              <a:spcAft>
-                <a:spcPts val="600"/>
-              </a:spcAft>
-            </a:pPr>
-            <a:r>
-              <a:rPr sz="1500">
-                <a:solidFill>
-                  <a:srgbClr val="22282E"/>
-                </a:solidFill>
-              </a:rPr>
-              <a:t>•  Usa únicamente hashes y contraseñas de prueba generados por ti.</a:t>
+              <a:t>•  Función de derivación de clave (KDF) para contraseñas: función lenta y ajustable que transforma la contraseña en un hash. Característica: coste configurable para frenar ataques.</a:t>
+            </a:r>
+          </a:p>
+          <a:p>
+            <a:pPr>
+              <a:spcAft>
+                <a:spcPts val="600"/>
+              </a:spcAft>
+            </a:pPr>
+            <a:r>
+              <a:rPr sz="1500">
+                <a:solidFill>
+                  <a:srgbClr val="22282E"/>
+                </a:solidFill>
+              </a:rPr>
+              <a:t>•  Salt: valor aleatorio único por usuario almacenado junto al hash; impide rainbow tables y colisiones entre usuarios con igual contraseña.</a:t>
+            </a:r>
+          </a:p>
+          <a:p>
+            <a:pPr>
+              <a:spcAft>
+                <a:spcPts val="600"/>
+              </a:spcAft>
+            </a:pPr>
+            <a:r>
+              <a:rPr sz="1500">
+                <a:solidFill>
+                  <a:srgbClr val="22282E"/>
+                </a:solidFill>
+              </a:rPr>
+              <a:t>•  Pepper: secreto global no almacenado en la base de datos (en HSM/KMS); añade una capa que el atacante no obtiene con solo el dump.</a:t>
+            </a:r>
+          </a:p>
+          <a:p>
+            <a:pPr>
+              <a:spcAft>
+                <a:spcPts val="600"/>
+              </a:spcAft>
+            </a:pPr>
+            <a:r>
+              <a:rPr sz="1500">
+                <a:solidFill>
+                  <a:srgbClr val="22282E"/>
+                </a:solidFill>
+              </a:rPr>
+              <a:t>•  bcrypt: KDF basada en Blowfish con factor de coste (rondas). Limitada a 72 bytes de entrada.</a:t>
+            </a:r>
+          </a:p>
+          <a:p>
+            <a:pPr>
+              <a:spcAft>
+                <a:spcPts val="600"/>
+              </a:spcAft>
+            </a:pPr>
+            <a:r>
+              <a:rPr sz="1500">
+                <a:solidFill>
+                  <a:srgbClr val="22282E"/>
+                </a:solidFill>
+              </a:rPr>
+              <a:t>•  scrypt: KDF con coste de memoria, dificultando ataques con hardware especializado.</a:t>
+            </a:r>
+          </a:p>
+          <a:p>
+            <a:pPr>
+              <a:spcAft>
+                <a:spcPts val="600"/>
+              </a:spcAft>
+            </a:pPr>
+            <a:r>
+              <a:rPr sz="1500">
+                <a:solidFill>
+                  <a:srgbClr val="22282E"/>
+                </a:solidFill>
+              </a:rPr>
+              <a:t>•  Argon2id: ganador del Password Hashing Competition; recomendado por defecto; combina resistencia a GPU y a side-channels.</a:t>
+            </a:r>
+          </a:p>
+          <a:p>
+            <a:pPr>
+              <a:spcAft>
+                <a:spcPts val="600"/>
+              </a:spcAft>
+            </a:pPr>
+            <a:r>
+              <a:rPr sz="1500">
+                <a:solidFill>
+                  <a:srgbClr val="22282E"/>
+                </a:solidFill>
+              </a:rPr>
+              <a:t>•  hashcat: herramienta de recuperación de contraseñas (para auditar la fortaleza de tus propios hashes).</a:t>
             </a:r>
           </a:p>
         </p:txBody>
@@ -4375,7 +4766,7 @@
                   <a:srgbClr val="0B3D2E"/>
                 </a:solidFill>
               </a:rPr>
-              <a:t>🧪 Laboratorio guiado</a:t>
+              <a:t>📔 Glosario</a:t>
             </a:r>
           </a:p>
         </p:txBody>
@@ -4413,97 +4804,97 @@
                   <a:srgbClr val="22282E"/>
                 </a:solidFill>
               </a:rPr>
-              <a:t>•  Hashea y verifica con Argon2id:</a:t>
-            </a:r>
-          </a:p>
-          <a:p>
-            <a:pPr>
-              <a:spcAft>
-                <a:spcPts val="600"/>
-              </a:spcAft>
-            </a:pPr>
-            <a:r>
-              <a:rPr sz="1500">
-                <a:solidFill>
-                  <a:srgbClr val="22282E"/>
-                </a:solidFill>
-              </a:rPr>
-              <a:t>•  from argon2 import PasswordHasher</a:t>
-            </a:r>
-          </a:p>
-          <a:p>
-            <a:pPr>
-              <a:spcAft>
-                <a:spcPts val="600"/>
-              </a:spcAft>
-            </a:pPr>
-            <a:r>
-              <a:rPr sz="1500">
-                <a:solidFill>
-                  <a:srgbClr val="22282E"/>
-                </a:solidFill>
-              </a:rPr>
-              <a:t>•  ph = PasswordHasher(timecost=3, memorycost=65536, parallelism=4)</a:t>
-            </a:r>
-          </a:p>
-          <a:p>
-            <a:pPr>
-              <a:spcAft>
-                <a:spcPts val="600"/>
-              </a:spcAft>
-            </a:pPr>
-            <a:r>
-              <a:rPr sz="1500">
-                <a:solidFill>
-                  <a:srgbClr val="22282E"/>
-                </a:solidFill>
-              </a:rPr>
-              <a:t>•  h = ph.hash("contraseña-de-prueba")</a:t>
-            </a:r>
-          </a:p>
-          <a:p>
-            <a:pPr>
-              <a:spcAft>
-                <a:spcPts val="600"/>
-              </a:spcAft>
-            </a:pPr>
-            <a:r>
-              <a:rPr sz="1500">
-                <a:solidFill>
-                  <a:srgbClr val="22282E"/>
-                </a:solidFill>
-              </a:rPr>
-              <a:t>•  print(h)                     # incluye salt y parámetros</a:t>
-            </a:r>
-          </a:p>
-          <a:p>
-            <a:pPr>
-              <a:spcAft>
-                <a:spcPts val="600"/>
-              </a:spcAft>
-            </a:pPr>
-            <a:r>
-              <a:rPr sz="1500">
-                <a:solidFill>
-                  <a:srgbClr val="22282E"/>
-                </a:solidFill>
-              </a:rPr>
-              <a:t>•  ph.verify(h, "contraseña-de-prueba")   # True o excepción</a:t>
-            </a:r>
-          </a:p>
-          <a:p>
-            <a:pPr>
-              <a:spcAft>
-                <a:spcPts val="600"/>
-              </a:spcAft>
-            </a:pPr>
-            <a:r>
-              <a:rPr sz="1500">
-                <a:solidFill>
-                  <a:srgbClr val="22282E"/>
-                </a:solidFill>
-              </a:rPr>
-              <a:t>•  bcrypt con factor de coste:</a:t>
+              <a:t>•  Término — Definición concisa</a:t>
+            </a:r>
+          </a:p>
+          <a:p>
+            <a:pPr>
+              <a:spcAft>
+                <a:spcPts val="600"/>
+              </a:spcAft>
+            </a:pPr>
+            <a:r>
+              <a:rPr sz="1500">
+                <a:solidFill>
+                  <a:srgbClr val="22282E"/>
+                </a:solidFill>
+              </a:rPr>
+              <a:t>•  KDF de contraseñas — Función deliberadamente lenta para almacenar contraseñas</a:t>
+            </a:r>
+          </a:p>
+          <a:p>
+            <a:pPr>
+              <a:spcAft>
+                <a:spcPts val="600"/>
+              </a:spcAft>
+            </a:pPr>
+            <a:r>
+              <a:rPr sz="1500">
+                <a:solidFill>
+                  <a:srgbClr val="22282E"/>
+                </a:solidFill>
+              </a:rPr>
+              <a:t>•  Factor de coste — Parámetro que encarece cada intento; se sube con el tiempo</a:t>
+            </a:r>
+          </a:p>
+          <a:p>
+            <a:pPr>
+              <a:spcAft>
+                <a:spcPts val="600"/>
+              </a:spcAft>
+            </a:pPr>
+            <a:r>
+              <a:rPr sz="1500">
+                <a:solidFill>
+                  <a:srgbClr val="22282E"/>
+                </a:solidFill>
+              </a:rPr>
+              <a:t>•  Salt — Valor aleatorio único por usuario, almacenado en claro</a:t>
+            </a:r>
+          </a:p>
+          <a:p>
+            <a:pPr>
+              <a:spcAft>
+                <a:spcPts val="600"/>
+              </a:spcAft>
+            </a:pPr>
+            <a:r>
+              <a:rPr sz="1500">
+                <a:solidFill>
+                  <a:srgbClr val="22282E"/>
+                </a:solidFill>
+              </a:rPr>
+              <a:t>•  Rainbow table — Tabla precomputada contraseña→hash; el salt la inutiliza</a:t>
+            </a:r>
+          </a:p>
+          <a:p>
+            <a:pPr>
+              <a:spcAft>
+                <a:spcPts val="600"/>
+              </a:spcAft>
+            </a:pPr>
+            <a:r>
+              <a:rPr sz="1500">
+                <a:solidFill>
+                  <a:srgbClr val="22282E"/>
+                </a:solidFill>
+              </a:rPr>
+              <a:t>•  Pepper — Secreto global fuera de la base de datos; defensa adicional</a:t>
+            </a:r>
+          </a:p>
+          <a:p>
+            <a:pPr>
+              <a:spcAft>
+                <a:spcPts val="600"/>
+              </a:spcAft>
+            </a:pPr>
+            <a:r>
+              <a:rPr sz="1500">
+                <a:solidFill>
+                  <a:srgbClr val="22282E"/>
+                </a:solidFill>
+              </a:rPr>
+              <a:t>•  bcrypt — KDF clásica con coste ajustable; memoria fija y límite de 72 bytes</a:t>
             </a:r>
           </a:p>
         </p:txBody>
@@ -4554,7 +4945,7 @@
                   <a:srgbClr val="0B3D2E"/>
                 </a:solidFill>
               </a:rPr>
-              <a:t>✍️ Ejercicios</a:t>
+              <a:t>🧰 Herramientas y preparación</a:t>
             </a:r>
           </a:p>
         </p:txBody>
@@ -4592,82 +4983,7 @@
                   <a:srgbClr val="22282E"/>
                 </a:solidFill>
               </a:rPr>
-              <a:t>•  Explica por qué un salt único por usuario derrota las rainbow tables.</a:t>
-            </a:r>
-          </a:p>
-          <a:p>
-            <a:pPr>
-              <a:spcAft>
-                <a:spcPts val="600"/>
-              </a:spcAft>
-            </a:pPr>
-            <a:r>
-              <a:rPr sz="1500">
-                <a:solidFill>
-                  <a:srgbClr val="22282E"/>
-                </a:solidFill>
-              </a:rPr>
-              <a:t>•  ¿Dónde debe guardarse el pepper y por qué no en la misma base de datos?</a:t>
-            </a:r>
-          </a:p>
-          <a:p>
-            <a:pPr>
-              <a:spcAft>
-                <a:spcPts val="600"/>
-              </a:spcAft>
-            </a:pPr>
-            <a:r>
-              <a:rPr sz="1500">
-                <a:solidFill>
-                  <a:srgbClr val="22282E"/>
-                </a:solidFill>
-              </a:rPr>
-              <a:t>•  Compara el tiempo de cracking de SHA-256 vs Argon2id para la misma wordlist.</a:t>
-            </a:r>
-          </a:p>
-          <a:p>
-            <a:pPr>
-              <a:spcAft>
-                <a:spcPts val="600"/>
-              </a:spcAft>
-            </a:pPr>
-            <a:r>
-              <a:rPr sz="1500">
-                <a:solidFill>
-                  <a:srgbClr val="22282E"/>
-                </a:solidFill>
-              </a:rPr>
-              <a:t>•  Calibra Argon2id para ~300 ms por hash en tu máquina.</a:t>
-            </a:r>
-          </a:p>
-          <a:p>
-            <a:pPr>
-              <a:spcAft>
-                <a:spcPts val="600"/>
-              </a:spcAft>
-            </a:pPr>
-            <a:r>
-              <a:rPr sz="1500">
-                <a:solidFill>
-                  <a:srgbClr val="22282E"/>
-                </a:solidFill>
-              </a:rPr>
-              <a:t>•  Investiga por qué bcrypt trunca a 72 bytes y cómo afecta a contraseñas largas.</a:t>
-            </a:r>
-          </a:p>
-          <a:p>
-            <a:pPr>
-              <a:spcAft>
-                <a:spcPts val="600"/>
-              </a:spcAft>
-            </a:pPr>
-            <a:r>
-              <a:rPr sz="1500">
-                <a:solidFill>
-                  <a:srgbClr val="22282E"/>
-                </a:solidFill>
-              </a:rPr>
-              <a:t>•  Diseña una política de migración de hashes SHA-256 heredados a Argon2id.</a:t>
+              <a:t>•  Usa únicamente hashes y contraseñas de prueba generados por ti.</a:t>
             </a:r>
           </a:p>
         </p:txBody>
@@ -4718,7 +5034,7 @@
                   <a:srgbClr val="0B3D2E"/>
                 </a:solidFill>
               </a:rPr>
-              <a:t>📝 Reto verificable</a:t>
+              <a:t>🧪 Laboratorio guiado</a:t>
             </a:r>
           </a:p>
         </p:txBody>
@@ -4756,7 +5072,67 @@
                   <a:srgbClr val="22282E"/>
                 </a:solidFill>
               </a:rPr>
-              <a:t>•  Implementa un módulo de registro/login que almacene contraseñas con Argon2id (salt automático, parámetros calibrados) y verifique en tiempo constante, más un migrador que rehashee credenciales antiguas al iniciar sesión. Criterio de aceptación: dos usuarios con la misma contraseña tienen hashes distintos, la verificación acepta la correcta y rechaza la incorrecta, y las cuentas legacy se actualizan transparentemente.</a:t>
+              <a:t>•  Hashea y verifica con Argon2id:</a:t>
+            </a:r>
+          </a:p>
+          <a:p>
+            <a:pPr>
+              <a:spcAft>
+                <a:spcPts val="600"/>
+              </a:spcAft>
+            </a:pPr>
+            <a:r>
+              <a:rPr sz="1500">
+                <a:solidFill>
+                  <a:srgbClr val="22282E"/>
+                </a:solidFill>
+              </a:rPr>
+              <a:t>•  bcrypt con factor de coste:</a:t>
+            </a:r>
+          </a:p>
+          <a:p>
+            <a:pPr>
+              <a:spcAft>
+                <a:spcPts val="600"/>
+              </a:spcAft>
+            </a:pPr>
+            <a:r>
+              <a:rPr sz="1500">
+                <a:solidFill>
+                  <a:srgbClr val="22282E"/>
+                </a:solidFill>
+              </a:rPr>
+              <a:t>•  Compara la lentitud. Mide el tiempo de hashear con SHA-256 vs Argon2id; observa que Argon2 es órdenes de magnitud más lento (por diseño).</a:t>
+            </a:r>
+          </a:p>
+          <a:p>
+            <a:pPr>
+              <a:spcAft>
+                <a:spcPts val="600"/>
+              </a:spcAft>
+            </a:pPr>
+            <a:r>
+              <a:rPr sz="1500">
+                <a:solidFill>
+                  <a:srgbClr val="22282E"/>
+                </a:solidFill>
+              </a:rPr>
+              <a:t>•  Ataque de diccionario en laboratorio. Genera unos pocos hashes bcrypt de contraseñas débiles propias y córrelos con hashcat contra una wordlist pequeña; mide cuántas caen y en cuánto tiempo. Repite…</a:t>
+            </a:r>
+          </a:p>
+          <a:p>
+            <a:pPr>
+              <a:spcAft>
+                <a:spcPts val="600"/>
+              </a:spcAft>
+            </a:pPr>
+            <a:r>
+              <a:rPr sz="1500">
+                <a:solidFill>
+                  <a:srgbClr val="22282E"/>
+                </a:solidFill>
+              </a:rPr>
+              <a:t>•  Calibra parámetros. Ajusta timecost/memorycost para que un hash tarde ~250-500 ms en tu hardware de producción objetivo.</a:t>
             </a:r>
           </a:p>
         </p:txBody>
